--- a/FloodView_Speed_Chart.pptx
+++ b/FloodView_Speed_Chart.pptx
@@ -217,7 +217,7 @@
               <c:strCache>
                 <c:ptCount val="1"/>
                 <c:pt idx="0">
-                  <c:v>JalRaksha</c:v>
+                  <c:v>FloodView</c:v>
                 </c:pt>
               </c:strCache>
             </c:strRef>
@@ -1534,7 +1534,7 @@
                 <a:ea typeface="Calibri" pitchFamily="34" charset="-122"/>
                 <a:cs typeface="Calibri" pitchFamily="34" charset="-120"/>
               </a:rPr>
-              <a:t>Current-practice figures are mid-range setup and runtime for Delft3D FM / HEC-RAS 2D on an equivalent domain; JalRaksha figures are measured on the prototype.</a:t>
+              <a:t>Current-practice figures are mid-range setup and runtime for Delft3D FM / HEC-RAS 2D on an equivalent domain; FloodView figures are measured on the prototype.</a:t>
             </a:r>
             <a:endParaRPr lang="en-US" sz="700" dirty="0"/>
           </a:p>
